--- a/Lectures/Lecture5.pptx
+++ b/Lectures/Lecture5.pptx
@@ -5,7 +5,7 @@
     <p:sldMasterId id="2147483648" r:id="rId1"/>
   </p:sldMasterIdLst>
   <p:notesMasterIdLst>
-    <p:notesMasterId r:id="rId37"/>
+    <p:notesMasterId r:id="rId38"/>
   </p:notesMasterIdLst>
   <p:sldIdLst>
     <p:sldId id="296" r:id="rId2"/>
@@ -42,7 +42,8 @@
     <p:sldId id="387" r:id="rId33"/>
     <p:sldId id="396" r:id="rId34"/>
     <p:sldId id="397" r:id="rId35"/>
-    <p:sldId id="393" r:id="rId36"/>
+    <p:sldId id="399" r:id="rId36"/>
+    <p:sldId id="393" r:id="rId37"/>
   </p:sldIdLst>
   <p:sldSz cx="12192000" cy="6858000"/>
   <p:notesSz cx="6858000" cy="9144000"/>
@@ -204,6 +205,7 @@
         <p14:section name="тесты" id="{F359A15B-04C6-4428-9686-7228C9403E2D}">
           <p14:sldIdLst>
             <p14:sldId id="397"/>
+            <p14:sldId id="399"/>
             <p14:sldId id="393"/>
           </p14:sldIdLst>
         </p14:section>
@@ -301,7 +303,7 @@
           <a:p>
             <a:fld id="{CBA08D16-15DC-4E25-BDC3-F25146157B16}" type="datetimeFigureOut">
               <a:rPr lang="ru-RU" smtClean="0"/>
-              <a:t>08.10.2025</a:t>
+              <a:t>14.10.2026</a:t>
             </a:fld>
             <a:endParaRPr lang="ru-RU"/>
           </a:p>
@@ -697,7 +699,7 @@
           <a:p>
             <a:fld id="{FCEC8293-DB51-454A-BE81-EC8FCB31EBA2}" type="datetime1">
               <a:rPr lang="ru-RU" smtClean="0"/>
-              <a:t>08.10.2025</a:t>
+              <a:t>14.10.2026</a:t>
             </a:fld>
             <a:endParaRPr lang="ru-RU"/>
           </a:p>
@@ -868,7 +870,7 @@
           <a:p>
             <a:fld id="{241C87B1-1C35-4DBD-BC18-2BC72E776603}" type="datetime1">
               <a:rPr lang="ru-RU" smtClean="0"/>
-              <a:t>08.10.2025</a:t>
+              <a:t>14.10.2026</a:t>
             </a:fld>
             <a:endParaRPr lang="ru-RU"/>
           </a:p>
@@ -1049,7 +1051,7 @@
           <a:p>
             <a:fld id="{3134C275-26C0-42CD-9111-9ADE65922AF9}" type="datetime1">
               <a:rPr lang="ru-RU" smtClean="0"/>
-              <a:t>08.10.2025</a:t>
+              <a:t>14.10.2026</a:t>
             </a:fld>
             <a:endParaRPr lang="ru-RU"/>
           </a:p>
@@ -1220,7 +1222,7 @@
           <a:p>
             <a:fld id="{C1A9A50B-C350-45F5-8AAB-ADB9E670AF2E}" type="datetime1">
               <a:rPr lang="ru-RU" smtClean="0"/>
-              <a:t>08.10.2025</a:t>
+              <a:t>14.10.2026</a:t>
             </a:fld>
             <a:endParaRPr lang="ru-RU"/>
           </a:p>
@@ -1468,7 +1470,7 @@
           <a:p>
             <a:fld id="{089688C9-348F-42F9-B6C0-5990DDE0C5B2}" type="datetime1">
               <a:rPr lang="ru-RU" smtClean="0"/>
-              <a:t>08.10.2025</a:t>
+              <a:t>14.10.2026</a:t>
             </a:fld>
             <a:endParaRPr lang="ru-RU"/>
           </a:p>
@@ -1700,7 +1702,7 @@
           <a:p>
             <a:fld id="{684AFD8F-6DD9-4AD3-A505-FDC3F5C5F3F6}" type="datetime1">
               <a:rPr lang="ru-RU" smtClean="0"/>
-              <a:t>08.10.2025</a:t>
+              <a:t>14.10.2026</a:t>
             </a:fld>
             <a:endParaRPr lang="ru-RU"/>
           </a:p>
@@ -2067,7 +2069,7 @@
           <a:p>
             <a:fld id="{63551EFE-4D02-45EB-A747-8B6F047B5AA0}" type="datetime1">
               <a:rPr lang="ru-RU" smtClean="0"/>
-              <a:t>08.10.2025</a:t>
+              <a:t>14.10.2026</a:t>
             </a:fld>
             <a:endParaRPr lang="ru-RU"/>
           </a:p>
@@ -2187,7 +2189,7 @@
           <a:p>
             <a:fld id="{813A9F34-E5CD-4B8F-AA9E-889C84372B20}" type="datetime1">
               <a:rPr lang="ru-RU" smtClean="0"/>
-              <a:t>08.10.2025</a:t>
+              <a:t>14.10.2026</a:t>
             </a:fld>
             <a:endParaRPr lang="ru-RU"/>
           </a:p>
@@ -2285,7 +2287,7 @@
           <a:p>
             <a:fld id="{51224D22-9B29-44A6-8E82-95FC492DEDC1}" type="datetime1">
               <a:rPr lang="ru-RU" smtClean="0"/>
-              <a:t>08.10.2025</a:t>
+              <a:t>14.10.2026</a:t>
             </a:fld>
             <a:endParaRPr lang="ru-RU"/>
           </a:p>
@@ -2563,7 +2565,7 @@
           <a:p>
             <a:fld id="{91D1034F-4441-48A1-BDC0-25EA1022324A}" type="datetime1">
               <a:rPr lang="ru-RU" smtClean="0"/>
-              <a:t>08.10.2025</a:t>
+              <a:t>14.10.2026</a:t>
             </a:fld>
             <a:endParaRPr lang="ru-RU"/>
           </a:p>
@@ -2818,7 +2820,7 @@
           <a:p>
             <a:fld id="{B0FFDE79-B627-473B-AE17-4C65BD2495F7}" type="datetime1">
               <a:rPr lang="ru-RU" smtClean="0"/>
-              <a:t>08.10.2025</a:t>
+              <a:t>14.10.2026</a:t>
             </a:fld>
             <a:endParaRPr lang="ru-RU"/>
           </a:p>
@@ -3032,7 +3034,7 @@
           <a:p>
             <a:fld id="{11CA537A-1B8C-47BA-9BA6-7CE3FAFDA8BE}" type="datetime1">
               <a:rPr lang="ru-RU" smtClean="0"/>
-              <a:t>08.10.2025</a:t>
+              <a:t>14.10.2026</a:t>
             </a:fld>
             <a:endParaRPr lang="ru-RU"/>
           </a:p>
@@ -3516,11 +3518,41 @@
           <a:p>
             <a:r>
               <a:rPr lang="ru-RU" dirty="0"/>
-              <a:t>МИФИ 2025</a:t>
-            </a:r>
-          </a:p>
-        </p:txBody>
-      </p:sp>
+              <a:t>МИФИ 2026</a:t>
+            </a:r>
+          </a:p>
+        </p:txBody>
+      </p:sp>
+      <p:pic>
+        <p:nvPicPr>
+          <p:cNvPr id="4" name="Рисунок 3">
+            <a:extLst>
+              <a:ext uri="{FF2B5EF4-FFF2-40B4-BE49-F238E27FC236}">
+                <a16:creationId xmlns:a16="http://schemas.microsoft.com/office/drawing/2014/main" id="{7913209F-821F-4604-87D7-17ECCC9568D9}"/>
+              </a:ext>
+            </a:extLst>
+          </p:cNvPr>
+          <p:cNvPicPr>
+            <a:picLocks noChangeAspect="1"/>
+          </p:cNvPicPr>
+          <p:nvPr/>
+        </p:nvPicPr>
+        <p:blipFill>
+          <a:blip r:embed="rId2"/>
+          <a:stretch>
+            <a:fillRect/>
+          </a:stretch>
+        </p:blipFill>
+        <p:spPr>
+          <a:xfrm>
+            <a:off x="9781413" y="3429000"/>
+            <a:ext cx="1773174" cy="1807274"/>
+          </a:xfrm>
+          <a:prstGeom prst="rect">
+            <a:avLst/>
+          </a:prstGeom>
+        </p:spPr>
+      </p:pic>
     </p:spTree>
     <p:extLst>
       <p:ext uri="{BB962C8B-B14F-4D97-AF65-F5344CB8AC3E}">
@@ -10563,7 +10595,7 @@
         <p:spPr>
           <a:xfrm>
             <a:off x="185371" y="1408578"/>
-            <a:ext cx="5318614" cy="3693319"/>
+            <a:ext cx="5318614" cy="1692771"/>
           </a:xfrm>
           <a:prstGeom prst="rect">
             <a:avLst/>
@@ -10581,7 +10613,7 @@
             </a:r>
             <a:r>
               <a:rPr lang="en-US" sz="2600" dirty="0"/>
-              <a:t>ECB </a:t>
+              <a:t>CFB </a:t>
             </a:r>
             <a:r>
               <a:rPr lang="ru-RU" sz="2600" dirty="0"/>
@@ -10601,25 +10633,13 @@
             </a:r>
             <a:r>
               <a:rPr lang="ru-RU" sz="2600" dirty="0"/>
-              <a:t>расшифрование (формула).</a:t>
-            </a:r>
-          </a:p>
-          <a:p>
+              <a:t>расшифрование (</a:t>
+            </a:r>
+            <a:r>
+              <a:rPr lang="ru-RU" sz="2600"/>
+              <a:t>формула).</a:t>
+            </a:r>
             <a:endParaRPr lang="ru-RU" sz="2600" dirty="0"/>
-          </a:p>
-          <a:p>
-            <a:r>
-              <a:rPr lang="ru-RU" sz="2600" dirty="0"/>
-              <a:t>Для каких сообщений </a:t>
-            </a:r>
-            <a:r>
-              <a:rPr lang="en-US" sz="2600" dirty="0"/>
-              <a:t>ECB </a:t>
-            </a:r>
-            <a:r>
-              <a:rPr lang="ru-RU" sz="2600" dirty="0"/>
-              <a:t>является семантически стойким при использовании стойкого блочного шифра?</a:t>
-            </a:r>
           </a:p>
         </p:txBody>
       </p:sp>
@@ -12950,6 +12970,525 @@
             <a:fld id="{8253DDDB-F8F7-4D64-A7FD-3F3D61C1949F}" type="slidenum">
               <a:rPr lang="ru-RU" smtClean="0"/>
               <a:t>35</a:t>
+            </a:fld>
+            <a:endParaRPr lang="ru-RU"/>
+          </a:p>
+        </p:txBody>
+      </p:sp>
+      <p:sp>
+        <p:nvSpPr>
+          <p:cNvPr id="5" name="Прямоугольник 4"/>
+          <p:cNvSpPr/>
+          <p:nvPr/>
+        </p:nvSpPr>
+        <p:spPr>
+          <a:xfrm>
+            <a:off x="284285" y="5433158"/>
+            <a:ext cx="10688515" cy="317012"/>
+          </a:xfrm>
+          <a:prstGeom prst="rect">
+            <a:avLst/>
+          </a:prstGeom>
+          <a:solidFill>
+            <a:schemeClr val="accent6">
+              <a:alpha val="50000"/>
+            </a:schemeClr>
+          </a:solidFill>
+          <a:ln>
+            <a:noFill/>
+          </a:ln>
+        </p:spPr>
+        <p:style>
+          <a:lnRef idx="0">
+            <a:scrgbClr r="0" g="0" b="0"/>
+          </a:lnRef>
+          <a:fillRef idx="0">
+            <a:scrgbClr r="0" g="0" b="0"/>
+          </a:fillRef>
+          <a:effectRef idx="0">
+            <a:scrgbClr r="0" g="0" b="0"/>
+          </a:effectRef>
+          <a:fontRef idx="minor">
+            <a:schemeClr val="lt1"/>
+          </a:fontRef>
+        </p:style>
+        <p:txBody>
+          <a:bodyPr rtlCol="0" anchor="ctr"/>
+          <a:lstStyle/>
+          <a:p>
+            <a:pPr algn="ctr"/>
+            <a:endParaRPr lang="ru-RU"/>
+          </a:p>
+        </p:txBody>
+      </p:sp>
+      <p:sp>
+        <p:nvSpPr>
+          <p:cNvPr id="6" name="Прямоугольник 5"/>
+          <p:cNvSpPr/>
+          <p:nvPr/>
+        </p:nvSpPr>
+        <p:spPr>
+          <a:xfrm>
+            <a:off x="284285" y="5819530"/>
+            <a:ext cx="10688515" cy="317012"/>
+          </a:xfrm>
+          <a:prstGeom prst="rect">
+            <a:avLst/>
+          </a:prstGeom>
+          <a:solidFill>
+            <a:schemeClr val="accent6">
+              <a:alpha val="50000"/>
+            </a:schemeClr>
+          </a:solidFill>
+          <a:ln>
+            <a:noFill/>
+          </a:ln>
+        </p:spPr>
+        <p:style>
+          <a:lnRef idx="0">
+            <a:scrgbClr r="0" g="0" b="0"/>
+          </a:lnRef>
+          <a:fillRef idx="0">
+            <a:scrgbClr r="0" g="0" b="0"/>
+          </a:fillRef>
+          <a:effectRef idx="0">
+            <a:scrgbClr r="0" g="0" b="0"/>
+          </a:effectRef>
+          <a:fontRef idx="minor">
+            <a:schemeClr val="lt1"/>
+          </a:fontRef>
+        </p:style>
+        <p:txBody>
+          <a:bodyPr rtlCol="0" anchor="ctr"/>
+          <a:lstStyle/>
+          <a:p>
+            <a:pPr algn="ctr"/>
+            <a:endParaRPr lang="ru-RU"/>
+          </a:p>
+        </p:txBody>
+      </p:sp>
+      <p:sp>
+        <p:nvSpPr>
+          <p:cNvPr id="7" name="Прямоугольник 6"/>
+          <p:cNvSpPr/>
+          <p:nvPr/>
+        </p:nvSpPr>
+        <p:spPr>
+          <a:xfrm>
+            <a:off x="284284" y="6205902"/>
+            <a:ext cx="10688515" cy="317012"/>
+          </a:xfrm>
+          <a:prstGeom prst="rect">
+            <a:avLst/>
+          </a:prstGeom>
+          <a:solidFill>
+            <a:schemeClr val="accent6">
+              <a:alpha val="50000"/>
+            </a:schemeClr>
+          </a:solidFill>
+          <a:ln>
+            <a:noFill/>
+          </a:ln>
+        </p:spPr>
+        <p:style>
+          <a:lnRef idx="0">
+            <a:scrgbClr r="0" g="0" b="0"/>
+          </a:lnRef>
+          <a:fillRef idx="0">
+            <a:scrgbClr r="0" g="0" b="0"/>
+          </a:fillRef>
+          <a:effectRef idx="0">
+            <a:scrgbClr r="0" g="0" b="0"/>
+          </a:effectRef>
+          <a:fontRef idx="minor">
+            <a:schemeClr val="lt1"/>
+          </a:fontRef>
+        </p:style>
+        <p:txBody>
+          <a:bodyPr rtlCol="0" anchor="ctr"/>
+          <a:lstStyle/>
+          <a:p>
+            <a:pPr algn="ctr"/>
+            <a:endParaRPr lang="ru-RU"/>
+          </a:p>
+        </p:txBody>
+      </p:sp>
+      <p:sp>
+        <p:nvSpPr>
+          <p:cNvPr id="19" name="Прямоугольник 18"/>
+          <p:cNvSpPr/>
+          <p:nvPr/>
+        </p:nvSpPr>
+        <p:spPr>
+          <a:xfrm>
+            <a:off x="185371" y="1408578"/>
+            <a:ext cx="5318614" cy="3693319"/>
+          </a:xfrm>
+          <a:prstGeom prst="rect">
+            <a:avLst/>
+          </a:prstGeom>
+        </p:spPr>
+        <p:txBody>
+          <a:bodyPr wrap="square">
+            <a:spAutoFit/>
+          </a:bodyPr>
+          <a:lstStyle/>
+          <a:p>
+            <a:r>
+              <a:rPr lang="ru-RU" sz="2600" dirty="0"/>
+              <a:t>Схема </a:t>
+            </a:r>
+            <a:r>
+              <a:rPr lang="en-US" sz="2600" dirty="0"/>
+              <a:t>ECB </a:t>
+            </a:r>
+            <a:r>
+              <a:rPr lang="ru-RU" sz="2600" dirty="0"/>
+              <a:t>блочного шифрования, нарисовать картинку</a:t>
+            </a:r>
+            <a:r>
+              <a:rPr lang="en-US" sz="2600" dirty="0"/>
+              <a:t> </a:t>
+            </a:r>
+            <a:r>
+              <a:rPr lang="ru-RU" sz="2600" dirty="0"/>
+              <a:t>или описать шифрование</a:t>
+            </a:r>
+            <a:r>
+              <a:rPr lang="en-US" sz="2600" dirty="0"/>
+              <a:t>/</a:t>
+            </a:r>
+            <a:r>
+              <a:rPr lang="ru-RU" sz="2600" dirty="0"/>
+              <a:t>расшифрование (формула).</a:t>
+            </a:r>
+          </a:p>
+          <a:p>
+            <a:endParaRPr lang="ru-RU" sz="2600" dirty="0"/>
+          </a:p>
+          <a:p>
+            <a:r>
+              <a:rPr lang="ru-RU" sz="2600" dirty="0"/>
+              <a:t>Для каких сообщений </a:t>
+            </a:r>
+            <a:r>
+              <a:rPr lang="en-US" sz="2600" dirty="0"/>
+              <a:t>ECB </a:t>
+            </a:r>
+            <a:r>
+              <a:rPr lang="ru-RU" sz="2600" dirty="0"/>
+              <a:t>является семантически стойким при использовании стойкого блочного шифра?</a:t>
+            </a:r>
+          </a:p>
+        </p:txBody>
+      </p:sp>
+      <p:sp>
+        <p:nvSpPr>
+          <p:cNvPr id="20" name="Объект 2"/>
+          <p:cNvSpPr>
+            <a:spLocks noGrp="1"/>
+          </p:cNvSpPr>
+          <p:nvPr>
+            <p:ph idx="1"/>
+          </p:nvPr>
+        </p:nvSpPr>
+        <p:spPr>
+          <a:xfrm>
+            <a:off x="5628541" y="1408579"/>
+            <a:ext cx="6148754" cy="4351338"/>
+          </a:xfrm>
+        </p:spPr>
+        <p:txBody>
+          <a:bodyPr/>
+          <a:lstStyle/>
+          <a:p>
+            <a:r>
+              <a:rPr lang="ru-RU" dirty="0"/>
+              <a:t>Положить телефон экраном вниз справа от себя</a:t>
+            </a:r>
+          </a:p>
+          <a:p>
+            <a:r>
+              <a:rPr lang="ru-RU" dirty="0"/>
+              <a:t>Не разговаривать с соседями</a:t>
+            </a:r>
+          </a:p>
+          <a:p>
+            <a:r>
+              <a:rPr lang="ru-RU" dirty="0"/>
+              <a:t>Не пользоваться конспектами и электронными устройствами</a:t>
+            </a:r>
+          </a:p>
+          <a:p>
+            <a:r>
+              <a:rPr lang="ru-RU" dirty="0"/>
+              <a:t>Написать номер (по таблице) и ФИО на листочке</a:t>
+            </a:r>
+          </a:p>
+          <a:p>
+            <a:r>
+              <a:rPr lang="ru-RU" dirty="0"/>
+              <a:t>Написать краткий ответ на вопрос</a:t>
+            </a:r>
+            <a:endParaRPr lang="en-US" dirty="0"/>
+          </a:p>
+          <a:p>
+            <a:r>
+              <a:rPr lang="ru-RU" dirty="0"/>
+              <a:t>Дождаться окончания теста</a:t>
+            </a:r>
+          </a:p>
+        </p:txBody>
+      </p:sp>
+    </p:spTree>
+    <p:extLst>
+      <p:ext uri="{BB962C8B-B14F-4D97-AF65-F5344CB8AC3E}">
+        <p14:creationId xmlns:p14="http://schemas.microsoft.com/office/powerpoint/2010/main" val="76546399"/>
+      </p:ext>
+    </p:extLst>
+  </p:cSld>
+  <p:clrMapOvr>
+    <a:masterClrMapping/>
+  </p:clrMapOvr>
+  <p:timing>
+    <p:tnLst>
+      <p:par>
+        <p:cTn id="1" dur="indefinite" restart="never" nodeType="tmRoot">
+          <p:childTnLst>
+            <p:seq concurrent="1" nextAc="seek">
+              <p:cTn id="2" dur="indefinite" nodeType="mainSeq">
+                <p:childTnLst>
+                  <p:par>
+                    <p:cTn id="3" fill="hold">
+                      <p:stCondLst>
+                        <p:cond delay="indefinite"/>
+                        <p:cond evt="onBegin" delay="0">
+                          <p:tn val="2"/>
+                        </p:cond>
+                      </p:stCondLst>
+                      <p:childTnLst>
+                        <p:par>
+                          <p:cTn id="4" fill="hold">
+                            <p:stCondLst>
+                              <p:cond delay="0"/>
+                            </p:stCondLst>
+                            <p:childTnLst>
+                              <p:par>
+                                <p:cTn id="5" presetID="22" presetClass="exit" presetSubtype="2" fill="hold" grpId="0" nodeType="withEffect">
+                                  <p:stCondLst>
+                                    <p:cond delay="0"/>
+                                  </p:stCondLst>
+                                  <p:childTnLst>
+                                    <p:animEffect transition="out" filter="wipe(right)">
+                                      <p:cBhvr>
+                                        <p:cTn id="6" dur="59000"/>
+                                        <p:tgtEl>
+                                          <p:spTgt spid="5"/>
+                                        </p:tgtEl>
+                                      </p:cBhvr>
+                                    </p:animEffect>
+                                    <p:set>
+                                      <p:cBhvr>
+                                        <p:cTn id="7" dur="1" fill="hold">
+                                          <p:stCondLst>
+                                            <p:cond delay="58999"/>
+                                          </p:stCondLst>
+                                        </p:cTn>
+                                        <p:tgtEl>
+                                          <p:spTgt spid="5"/>
+                                        </p:tgtEl>
+                                        <p:attrNameLst>
+                                          <p:attrName>style.visibility</p:attrName>
+                                        </p:attrNameLst>
+                                      </p:cBhvr>
+                                      <p:to>
+                                        <p:strVal val="hidden"/>
+                                      </p:to>
+                                    </p:set>
+                                  </p:childTnLst>
+                                </p:cTn>
+                              </p:par>
+                            </p:childTnLst>
+                          </p:cTn>
+                        </p:par>
+                        <p:par>
+                          <p:cTn id="8" fill="hold">
+                            <p:stCondLst>
+                              <p:cond delay="59000"/>
+                            </p:stCondLst>
+                            <p:childTnLst>
+                              <p:par>
+                                <p:cTn id="9" presetID="22" presetClass="exit" presetSubtype="2" fill="hold" grpId="0" nodeType="afterEffect">
+                                  <p:stCondLst>
+                                    <p:cond delay="0"/>
+                                  </p:stCondLst>
+                                  <p:childTnLst>
+                                    <p:animEffect transition="out" filter="wipe(right)">
+                                      <p:cBhvr>
+                                        <p:cTn id="10" dur="59000"/>
+                                        <p:tgtEl>
+                                          <p:spTgt spid="6"/>
+                                        </p:tgtEl>
+                                      </p:cBhvr>
+                                    </p:animEffect>
+                                    <p:set>
+                                      <p:cBhvr>
+                                        <p:cTn id="11" dur="1" fill="hold">
+                                          <p:stCondLst>
+                                            <p:cond delay="58999"/>
+                                          </p:stCondLst>
+                                        </p:cTn>
+                                        <p:tgtEl>
+                                          <p:spTgt spid="6"/>
+                                        </p:tgtEl>
+                                        <p:attrNameLst>
+                                          <p:attrName>style.visibility</p:attrName>
+                                        </p:attrNameLst>
+                                      </p:cBhvr>
+                                      <p:to>
+                                        <p:strVal val="hidden"/>
+                                      </p:to>
+                                    </p:set>
+                                  </p:childTnLst>
+                                </p:cTn>
+                              </p:par>
+                            </p:childTnLst>
+                          </p:cTn>
+                        </p:par>
+                        <p:par>
+                          <p:cTn id="12" fill="hold">
+                            <p:stCondLst>
+                              <p:cond delay="118000"/>
+                            </p:stCondLst>
+                            <p:childTnLst>
+                              <p:par>
+                                <p:cTn id="13" presetID="22" presetClass="exit" presetSubtype="2" fill="hold" grpId="0" nodeType="afterEffect">
+                                  <p:stCondLst>
+                                    <p:cond delay="0"/>
+                                  </p:stCondLst>
+                                  <p:childTnLst>
+                                    <p:animEffect transition="out" filter="wipe(right)">
+                                      <p:cBhvr>
+                                        <p:cTn id="14" dur="59000"/>
+                                        <p:tgtEl>
+                                          <p:spTgt spid="7"/>
+                                        </p:tgtEl>
+                                      </p:cBhvr>
+                                    </p:animEffect>
+                                    <p:set>
+                                      <p:cBhvr>
+                                        <p:cTn id="15" dur="1" fill="hold">
+                                          <p:stCondLst>
+                                            <p:cond delay="58999"/>
+                                          </p:stCondLst>
+                                        </p:cTn>
+                                        <p:tgtEl>
+                                          <p:spTgt spid="7"/>
+                                        </p:tgtEl>
+                                        <p:attrNameLst>
+                                          <p:attrName>style.visibility</p:attrName>
+                                        </p:attrNameLst>
+                                      </p:cBhvr>
+                                      <p:to>
+                                        <p:strVal val="hidden"/>
+                                      </p:to>
+                                    </p:set>
+                                  </p:childTnLst>
+                                </p:cTn>
+                              </p:par>
+                            </p:childTnLst>
+                          </p:cTn>
+                        </p:par>
+                      </p:childTnLst>
+                    </p:cTn>
+                  </p:par>
+                </p:childTnLst>
+              </p:cTn>
+              <p:prevCondLst>
+                <p:cond evt="onPrev" delay="0">
+                  <p:tgtEl>
+                    <p:sldTgt/>
+                  </p:tgtEl>
+                </p:cond>
+              </p:prevCondLst>
+              <p:nextCondLst>
+                <p:cond evt="onNext" delay="0">
+                  <p:tgtEl>
+                    <p:sldTgt/>
+                  </p:tgtEl>
+                </p:cond>
+              </p:nextCondLst>
+            </p:seq>
+          </p:childTnLst>
+        </p:cTn>
+      </p:par>
+    </p:tnLst>
+    <p:bldLst>
+      <p:bldP spid="5" grpId="0" animBg="1"/>
+      <p:bldP spid="6" grpId="0" animBg="1"/>
+      <p:bldP spid="7" grpId="0" animBg="1"/>
+    </p:bldLst>
+  </p:timing>
+</p:sld>
+</file>
+
+<file path=ppt/slides/slide36.xml><?xml version="1.0" encoding="utf-8"?>
+<p:sld xmlns:a="http://schemas.openxmlformats.org/drawingml/2006/main" xmlns:r="http://schemas.openxmlformats.org/officeDocument/2006/relationships" xmlns:p="http://schemas.openxmlformats.org/presentationml/2006/main">
+  <p:cSld>
+    <p:spTree>
+      <p:nvGrpSpPr>
+        <p:cNvPr id="1" name=""/>
+        <p:cNvGrpSpPr/>
+        <p:nvPr/>
+      </p:nvGrpSpPr>
+      <p:grpSpPr>
+        <a:xfrm>
+          <a:off x="0" y="0"/>
+          <a:ext cx="0" cy="0"/>
+          <a:chOff x="0" y="0"/>
+          <a:chExt cx="0" cy="0"/>
+        </a:xfrm>
+      </p:grpSpPr>
+      <p:sp>
+        <p:nvSpPr>
+          <p:cNvPr id="2" name="Заголовок 1"/>
+          <p:cNvSpPr>
+            <a:spLocks noGrp="1"/>
+          </p:cNvSpPr>
+          <p:nvPr>
+            <p:ph type="title"/>
+          </p:nvPr>
+        </p:nvSpPr>
+        <p:spPr/>
+        <p:txBody>
+          <a:bodyPr/>
+          <a:lstStyle/>
+          <a:p>
+            <a:r>
+              <a:rPr lang="ru-RU" dirty="0"/>
+              <a:t>Тест.</a:t>
+            </a:r>
+          </a:p>
+        </p:txBody>
+      </p:sp>
+      <p:sp>
+        <p:nvSpPr>
+          <p:cNvPr id="4" name="Номер слайда 3"/>
+          <p:cNvSpPr>
+            <a:spLocks noGrp="1"/>
+          </p:cNvSpPr>
+          <p:nvPr>
+            <p:ph type="sldNum" sz="quarter" idx="12"/>
+          </p:nvPr>
+        </p:nvSpPr>
+        <p:spPr/>
+        <p:txBody>
+          <a:bodyPr/>
+          <a:lstStyle/>
+          <a:p>
+            <a:fld id="{8253DDDB-F8F7-4D64-A7FD-3F3D61C1949F}" type="slidenum">
+              <a:rPr lang="ru-RU" smtClean="0"/>
+              <a:t>36</a:t>
             </a:fld>
             <a:endParaRPr lang="ru-RU"/>
           </a:p>
